--- a/Reporte 020626.pptx
+++ b/Reporte 020626.pptx
@@ -6276,10 +6276,10 @@
       </p:sp>
       <p:pic>
         <p:nvPicPr>
-          <p:cNvPr id="5" name="Imagen 4">
+          <p:cNvPr id="4" name="Imagen 3">
             <a:extLst>
               <a:ext uri="{FF2B5EF4-FFF2-40B4-BE49-F238E27FC236}">
-                <a16:creationId xmlns:a16="http://schemas.microsoft.com/office/drawing/2014/main" id="{E75C169F-A291-AFD8-13B4-E3F13E303EE0}"/>
+                <a16:creationId xmlns:a16="http://schemas.microsoft.com/office/drawing/2014/main" id="{C470D902-604E-A372-1C49-30A7527ADF82}"/>
               </a:ext>
             </a:extLst>
           </p:cNvPr>
@@ -6296,8 +6296,8 @@
         </p:blipFill>
         <p:spPr>
           <a:xfrm>
-            <a:off x="-6725" y="895589"/>
-            <a:ext cx="9144000" cy="3495197"/>
+            <a:off x="0" y="872893"/>
+            <a:ext cx="9144000" cy="3540589"/>
           </a:xfrm>
           <a:prstGeom prst="rect">
             <a:avLst/>
@@ -6374,10 +6374,10 @@
       </p:sp>
       <p:pic>
         <p:nvPicPr>
-          <p:cNvPr id="4" name="Imagen 3">
+          <p:cNvPr id="3" name="Imagen 2">
             <a:extLst>
               <a:ext uri="{FF2B5EF4-FFF2-40B4-BE49-F238E27FC236}">
-                <a16:creationId xmlns:a16="http://schemas.microsoft.com/office/drawing/2014/main" id="{AC9752BB-317F-C897-824B-26F15760DBAB}"/>
+                <a16:creationId xmlns:a16="http://schemas.microsoft.com/office/drawing/2014/main" id="{12536DA5-4664-1776-A7CC-8CEDFABBD892}"/>
               </a:ext>
             </a:extLst>
           </p:cNvPr>
@@ -6394,8 +6394,8 @@
         </p:blipFill>
         <p:spPr>
           <a:xfrm>
-            <a:off x="0" y="1344780"/>
-            <a:ext cx="9144000" cy="2596816"/>
+            <a:off x="0" y="1361718"/>
+            <a:ext cx="9144000" cy="2562939"/>
           </a:xfrm>
           <a:prstGeom prst="rect">
             <a:avLst/>
@@ -6478,10 +6478,10 @@
       </p:sp>
       <p:pic>
         <p:nvPicPr>
-          <p:cNvPr id="3" name="Imagen 2">
+          <p:cNvPr id="4" name="Imagen 3">
             <a:extLst>
               <a:ext uri="{FF2B5EF4-FFF2-40B4-BE49-F238E27FC236}">
-                <a16:creationId xmlns:a16="http://schemas.microsoft.com/office/drawing/2014/main" id="{86B2DCAA-9E75-02ED-E6ED-5FD148B941FE}"/>
+                <a16:creationId xmlns:a16="http://schemas.microsoft.com/office/drawing/2014/main" id="{F11CE18C-9DD3-0D61-9469-478F52C38835}"/>
               </a:ext>
             </a:extLst>
           </p:cNvPr>
@@ -6498,8 +6498,8 @@
         </p:blipFill>
         <p:spPr>
           <a:xfrm>
-            <a:off x="0" y="696038"/>
-            <a:ext cx="9144000" cy="3894299"/>
+            <a:off x="0" y="654351"/>
+            <a:ext cx="9144000" cy="3977673"/>
           </a:xfrm>
           <a:prstGeom prst="rect">
             <a:avLst/>
@@ -6576,10 +6576,10 @@
       </p:sp>
       <p:pic>
         <p:nvPicPr>
-          <p:cNvPr id="5" name="Imagen 4">
+          <p:cNvPr id="4" name="Imagen 3">
             <a:extLst>
               <a:ext uri="{FF2B5EF4-FFF2-40B4-BE49-F238E27FC236}">
-                <a16:creationId xmlns:a16="http://schemas.microsoft.com/office/drawing/2014/main" id="{20D100AF-32EB-7D55-1E85-CE2D35EA6F75}"/>
+                <a16:creationId xmlns:a16="http://schemas.microsoft.com/office/drawing/2014/main" id="{0DADCF4E-6074-C14E-53B2-255529F9E7F3}"/>
               </a:ext>
             </a:extLst>
           </p:cNvPr>
@@ -6596,8 +6596,8 @@
         </p:blipFill>
         <p:spPr>
           <a:xfrm>
-            <a:off x="0" y="1270321"/>
-            <a:ext cx="9144000" cy="2745733"/>
+            <a:off x="0" y="1269311"/>
+            <a:ext cx="9144000" cy="2747754"/>
           </a:xfrm>
           <a:prstGeom prst="rect">
             <a:avLst/>
@@ -6674,10 +6674,10 @@
       </p:sp>
       <p:pic>
         <p:nvPicPr>
-          <p:cNvPr id="3" name="Imagen 2">
+          <p:cNvPr id="4" name="Imagen 3">
             <a:extLst>
               <a:ext uri="{FF2B5EF4-FFF2-40B4-BE49-F238E27FC236}">
-                <a16:creationId xmlns:a16="http://schemas.microsoft.com/office/drawing/2014/main" id="{2DB914B2-1845-19D4-2E8E-9A3C06F837D4}"/>
+                <a16:creationId xmlns:a16="http://schemas.microsoft.com/office/drawing/2014/main" id="{C9FB3827-0ACE-B505-ADAB-FC48A69655FC}"/>
               </a:ext>
             </a:extLst>
           </p:cNvPr>
@@ -6694,8 +6694,8 @@
         </p:blipFill>
         <p:spPr>
           <a:xfrm>
-            <a:off x="-1" y="699327"/>
-            <a:ext cx="9144000" cy="3887721"/>
+            <a:off x="0" y="1591022"/>
+            <a:ext cx="9144000" cy="2104331"/>
           </a:xfrm>
           <a:prstGeom prst="rect">
             <a:avLst/>
@@ -6772,10 +6772,10 @@
       </p:sp>
       <p:pic>
         <p:nvPicPr>
-          <p:cNvPr id="3" name="Imagen 2">
+          <p:cNvPr id="5" name="Imagen 4">
             <a:extLst>
               <a:ext uri="{FF2B5EF4-FFF2-40B4-BE49-F238E27FC236}">
-                <a16:creationId xmlns:a16="http://schemas.microsoft.com/office/drawing/2014/main" id="{AEFC77A2-3095-0E3E-23AE-75CCA94D051D}"/>
+                <a16:creationId xmlns:a16="http://schemas.microsoft.com/office/drawing/2014/main" id="{0572DEB3-9B30-87BA-0DBB-17DD945F69FA}"/>
               </a:ext>
             </a:extLst>
           </p:cNvPr>
@@ -6792,8 +6792,8 @@
         </p:blipFill>
         <p:spPr>
           <a:xfrm>
-            <a:off x="0" y="1224638"/>
-            <a:ext cx="9144000" cy="2837100"/>
+            <a:off x="0" y="912380"/>
+            <a:ext cx="9144000" cy="3318739"/>
           </a:xfrm>
           <a:prstGeom prst="rect">
             <a:avLst/>
